--- a/evaluation/dashboard/public/decks/uxl-specialized-target-onboarding.pptx
+++ b/evaluation/dashboard/public/decks/uxl-specialized-target-onboarding.pptx
@@ -2,25 +2,25 @@
 <file path=ppt/presentation.xml><?xml version="1.0" encoding="utf-8"?>
 <p:presentation xmlns:p="http://schemas.openxmlformats.org/presentationml/2006/main">
   <p:sldMasterIdLst>
-    <p:sldMasterId xmlns:r="http://schemas.openxmlformats.org/officeDocument/2006/relationships" id="2147483648" r:id="Rc39a1dfeb8d641f7"/>
-    <p:sldMasterId xmlns:r="http://schemas.openxmlformats.org/officeDocument/2006/relationships" id="2147483665" r:id="R7dc15a6946dc4842"/>
+    <p:sldMasterId xmlns:r="http://schemas.openxmlformats.org/officeDocument/2006/relationships" id="2147483648" r:id="R4ca4aacb8d48487a"/>
+    <p:sldMasterId xmlns:r="http://schemas.openxmlformats.org/officeDocument/2006/relationships" id="2147483665" r:id="R5fe6642afe154514"/>
   </p:sldMasterIdLst>
   <p:notesMasterIdLst>
-    <p:notesMasterId xmlns:r="http://schemas.openxmlformats.org/officeDocument/2006/relationships" r:id="Rd348bb7f9a724c14"/>
+    <p:notesMasterId xmlns:r="http://schemas.openxmlformats.org/officeDocument/2006/relationships" r:id="R7316e4dbd11d443e"/>
   </p:notesMasterIdLst>
   <p:sldIdLst>
-    <p:sldId xmlns:r="http://schemas.openxmlformats.org/officeDocument/2006/relationships" id="256" r:id="R722acc40b2ca45fb"/>
-    <p:sldId xmlns:r="http://schemas.openxmlformats.org/officeDocument/2006/relationships" id="257" r:id="Rf653fdb321c04852"/>
-    <p:sldId xmlns:r="http://schemas.openxmlformats.org/officeDocument/2006/relationships" id="258" r:id="Refb7627f0df943d1"/>
-    <p:sldId xmlns:r="http://schemas.openxmlformats.org/officeDocument/2006/relationships" id="259" r:id="Ra1cbd2d23e9f4c64"/>
-    <p:sldId xmlns:r="http://schemas.openxmlformats.org/officeDocument/2006/relationships" id="260" r:id="R06a50a2d60f845a0"/>
-    <p:sldId xmlns:r="http://schemas.openxmlformats.org/officeDocument/2006/relationships" id="261" r:id="R8e6a1da686c048a5"/>
-    <p:sldId xmlns:r="http://schemas.openxmlformats.org/officeDocument/2006/relationships" id="262" r:id="Refb05fe7f7f74c20"/>
-    <p:sldId xmlns:r="http://schemas.openxmlformats.org/officeDocument/2006/relationships" id="263" r:id="Rfef1e08c1a764b69"/>
-    <p:sldId xmlns:r="http://schemas.openxmlformats.org/officeDocument/2006/relationships" id="264" r:id="R2dd57351e0b3449f"/>
-    <p:sldId xmlns:r="http://schemas.openxmlformats.org/officeDocument/2006/relationships" id="265" r:id="R68718a5ea9ae40e2"/>
-    <p:sldId xmlns:r="http://schemas.openxmlformats.org/officeDocument/2006/relationships" id="266" r:id="Rd832eb606bd74837"/>
-    <p:sldId xmlns:r="http://schemas.openxmlformats.org/officeDocument/2006/relationships" id="267" r:id="R4f332b57773a4457"/>
+    <p:sldId xmlns:r="http://schemas.openxmlformats.org/officeDocument/2006/relationships" id="256" r:id="R0ba7eeff664145f0"/>
+    <p:sldId xmlns:r="http://schemas.openxmlformats.org/officeDocument/2006/relationships" id="257" r:id="R6ef60d3faf154266"/>
+    <p:sldId xmlns:r="http://schemas.openxmlformats.org/officeDocument/2006/relationships" id="258" r:id="Reae5da06b72347f6"/>
+    <p:sldId xmlns:r="http://schemas.openxmlformats.org/officeDocument/2006/relationships" id="259" r:id="R71be468f6c2945c2"/>
+    <p:sldId xmlns:r="http://schemas.openxmlformats.org/officeDocument/2006/relationships" id="260" r:id="R0e9e2f1cbc2e4420"/>
+    <p:sldId xmlns:r="http://schemas.openxmlformats.org/officeDocument/2006/relationships" id="261" r:id="Raf53f29993b64e0e"/>
+    <p:sldId xmlns:r="http://schemas.openxmlformats.org/officeDocument/2006/relationships" id="262" r:id="Rad5e575da1b34cbd"/>
+    <p:sldId xmlns:r="http://schemas.openxmlformats.org/officeDocument/2006/relationships" id="263" r:id="Re18f22e7d1f74708"/>
+    <p:sldId xmlns:r="http://schemas.openxmlformats.org/officeDocument/2006/relationships" id="264" r:id="Ref4e239e9bec410a"/>
+    <p:sldId xmlns:r="http://schemas.openxmlformats.org/officeDocument/2006/relationships" id="265" r:id="R1cfcbf6798bb4218"/>
+    <p:sldId xmlns:r="http://schemas.openxmlformats.org/officeDocument/2006/relationships" id="266" r:id="R8c575707c9ee41d8"/>
+    <p:sldId xmlns:r="http://schemas.openxmlformats.org/officeDocument/2006/relationships" id="267" r:id="R06ce0c2a4a154a7c"/>
   </p:sldIdLst>
   <p:sldSz cx="12192000" cy="6858000"/>
   <p:notesSz cx="6858000" cy="9144000"/>
@@ -489,7 +489,7 @@
           </a:p>
           <a:p xmlns:a="http://schemas.openxmlformats.org/drawingml/2006/main">
             <a:r>
-              <a:t>- https://github.com/uxlfoundation/skills/blob/main/docs/self-hosted-runners.md</a:t>
+              <a:t>- https://github.com/uxlfoundation/skills/blob/main/docs/target-device-adapter.md</a:t>
             </a:r>
           </a:p>
           <a:p xmlns:a="http://schemas.openxmlformats.org/drawingml/2006/main">
@@ -499,12 +499,7 @@
           </a:p>
           <a:p xmlns:a="http://schemas.openxmlformats.org/drawingml/2006/main">
             <a:r>
-              <a:t>- https://github.com/uxlfoundation/skills/tree/main/evaluation/runner-control-repo-template</a:t>
-            </a:r>
-          </a:p>
-          <a:p xmlns:a="http://schemas.openxmlformats.org/drawingml/2006/main">
-            <a:r>
-              <a:t>- https://github.com/uxlfoundation/skills/tree/main/scripts/runner</a:t>
+              <a:t>- https://github.com/uxlfoundation/skills/tree/main/evaluation/runner</a:t>
             </a:r>
           </a:p>
           <a:p xmlns:a="http://schemas.openxmlformats.org/drawingml/2006/main">
@@ -514,21 +509,6 @@
           </a:p>
           <a:p xmlns:a="http://schemas.openxmlformats.org/drawingml/2006/main">
             <a:r>
-              <a:t>- https://github.com/uxlfoundation/skills/blob/main/docs/forward-testing.md</a:t>
-            </a:r>
-          </a:p>
-          <a:p xmlns:a="http://schemas.openxmlformats.org/drawingml/2006/main">
-            <a:r>
-              <a:t>- https://github.com/uxlfoundation/skills/blob/main/docs/evaluator-operator-guide.md</a:t>
-            </a:r>
-          </a:p>
-          <a:p xmlns:a="http://schemas.openxmlformats.org/drawingml/2006/main">
-            <a:r>
-              <a:t>- https://github.com/uxlfoundation/skills/blob/main/.github/workflows/harbor-hardware.yml</a:t>
-            </a:r>
-          </a:p>
-          <a:p xmlns:a="http://schemas.openxmlformats.org/drawingml/2006/main">
-            <a:r>
               <a:t>[/Sources]</a:t>
             </a:r>
           </a:p>
@@ -539,7 +519,22 @@
           </a:p>
           <a:p xmlns:a="http://schemas.openxmlformats.org/drawingml/2006/main">
             <a:r>
-              <a:t>Speaker cue: Add a Specialized Evaluation Target</a:t>
+              <a:t>Presenter guidance</a:t>
+            </a:r>
+          </a:p>
+          <a:p xmlns:a="http://schemas.openxmlformats.org/drawingml/2006/main">
+            <a:r>
+              <a:t>Purpose: Introduce the target-onboarding guide for engineers adding specialized execution capacity.</a:t>
+            </a:r>
+          </a:p>
+          <a:p xmlns:a="http://schemas.openxmlformats.org/drawingml/2006/main">
+            <a:r>
+              <a:t>Explain: The guide applies to GPUs, accelerators, multi-node systems, and other machines that hosted runners cannot represent faithfully.</a:t>
+            </a:r>
+          </a:p>
+          <a:p xmlns:a="http://schemas.openxmlformats.org/drawingml/2006/main">
+            <a:r>
+              <a:t>Emphasize: It is intentionally vendor-neutral; the target adapter changes while the public task, verifier, and evidence contract remain stable.</a:t>
             </a:r>
           </a:p>
         </p:txBody>
@@ -614,7 +609,7 @@
           </a:p>
           <a:p xmlns:a="http://schemas.openxmlformats.org/drawingml/2006/main">
             <a:r>
-              <a:t>- https://github.com/uxlfoundation/skills/blob/main/docs/self-hosted-runners.md</a:t>
+              <a:t>- https://github.com/uxlfoundation/skills/blob/main/docs/target-device-adapter.md</a:t>
             </a:r>
           </a:p>
           <a:p xmlns:a="http://schemas.openxmlformats.org/drawingml/2006/main">
@@ -624,12 +619,7 @@
           </a:p>
           <a:p xmlns:a="http://schemas.openxmlformats.org/drawingml/2006/main">
             <a:r>
-              <a:t>- https://github.com/uxlfoundation/skills/tree/main/evaluation/runner-control-repo-template</a:t>
-            </a:r>
-          </a:p>
-          <a:p xmlns:a="http://schemas.openxmlformats.org/drawingml/2006/main">
-            <a:r>
-              <a:t>- https://github.com/uxlfoundation/skills/tree/main/scripts/runner</a:t>
+              <a:t>- https://github.com/uxlfoundation/skills/tree/main/evaluation/runner</a:t>
             </a:r>
           </a:p>
           <a:p xmlns:a="http://schemas.openxmlformats.org/drawingml/2006/main">
@@ -639,21 +629,6 @@
           </a:p>
           <a:p xmlns:a="http://schemas.openxmlformats.org/drawingml/2006/main">
             <a:r>
-              <a:t>- https://github.com/uxlfoundation/skills/blob/main/docs/forward-testing.md</a:t>
-            </a:r>
-          </a:p>
-          <a:p xmlns:a="http://schemas.openxmlformats.org/drawingml/2006/main">
-            <a:r>
-              <a:t>- https://github.com/uxlfoundation/skills/blob/main/docs/evaluator-operator-guide.md</a:t>
-            </a:r>
-          </a:p>
-          <a:p xmlns:a="http://schemas.openxmlformats.org/drawingml/2006/main">
-            <a:r>
-              <a:t>- https://github.com/uxlfoundation/skills/blob/main/.github/workflows/harbor-hardware.yml</a:t>
-            </a:r>
-          </a:p>
-          <a:p xmlns:a="http://schemas.openxmlformats.org/drawingml/2006/main">
-            <a:r>
               <a:t>[/Sources]</a:t>
             </a:r>
           </a:p>
@@ -664,7 +639,22 @@
           </a:p>
           <a:p xmlns:a="http://schemas.openxmlformats.org/drawingml/2006/main">
             <a:r>
-              <a:t>Speaker cue: 7. Import the result and inspect it like any hosted run</a:t>
+              <a:t>Presenter guidance</a:t>
+            </a:r>
+          </a:p>
+          <a:p xmlns:a="http://schemas.openxmlformats.org/drawingml/2006/main">
+            <a:r>
+              <a:t>Purpose: Explain how private artifacts become public evidence safely.</a:t>
+            </a:r>
+          </a:p>
+          <a:p xmlns:a="http://schemas.openxmlformats.org/drawingml/2006/main">
+            <a:r>
+              <a:t>Explain: The importer verifies hashes, stages a sanitized qualification record, and keeps trajectories or logs with sensitive machine details access-controlled.</a:t>
+            </a:r>
+          </a:p>
+          <a:p xmlns:a="http://schemas.openxmlformats.org/drawingml/2006/main">
+            <a:r>
+              <a:t>Emphasize: Publication is a reviewed step; a raw runner artifact should never appear on the public dashboard automatically.</a:t>
             </a:r>
           </a:p>
         </p:txBody>
@@ -739,7 +729,7 @@
           </a:p>
           <a:p xmlns:a="http://schemas.openxmlformats.org/drawingml/2006/main">
             <a:r>
-              <a:t>- https://github.com/uxlfoundation/skills/blob/main/docs/self-hosted-runners.md</a:t>
+              <a:t>- https://github.com/uxlfoundation/skills/blob/main/docs/target-device-adapter.md</a:t>
             </a:r>
           </a:p>
           <a:p xmlns:a="http://schemas.openxmlformats.org/drawingml/2006/main">
@@ -749,12 +739,7 @@
           </a:p>
           <a:p xmlns:a="http://schemas.openxmlformats.org/drawingml/2006/main">
             <a:r>
-              <a:t>- https://github.com/uxlfoundation/skills/tree/main/evaluation/runner-control-repo-template</a:t>
-            </a:r>
-          </a:p>
-          <a:p xmlns:a="http://schemas.openxmlformats.org/drawingml/2006/main">
-            <a:r>
-              <a:t>- https://github.com/uxlfoundation/skills/tree/main/scripts/runner</a:t>
+              <a:t>- https://github.com/uxlfoundation/skills/tree/main/evaluation/runner</a:t>
             </a:r>
           </a:p>
           <a:p xmlns:a="http://schemas.openxmlformats.org/drawingml/2006/main">
@@ -764,21 +749,6 @@
           </a:p>
           <a:p xmlns:a="http://schemas.openxmlformats.org/drawingml/2006/main">
             <a:r>
-              <a:t>- https://github.com/uxlfoundation/skills/blob/main/docs/forward-testing.md</a:t>
-            </a:r>
-          </a:p>
-          <a:p xmlns:a="http://schemas.openxmlformats.org/drawingml/2006/main">
-            <a:r>
-              <a:t>- https://github.com/uxlfoundation/skills/blob/main/docs/evaluator-operator-guide.md</a:t>
-            </a:r>
-          </a:p>
-          <a:p xmlns:a="http://schemas.openxmlformats.org/drawingml/2006/main">
-            <a:r>
-              <a:t>- https://github.com/uxlfoundation/skills/blob/main/.github/workflows/harbor-hardware.yml</a:t>
-            </a:r>
-          </a:p>
-          <a:p xmlns:a="http://schemas.openxmlformats.org/drawingml/2006/main">
-            <a:r>
               <a:t>[/Sources]</a:t>
             </a:r>
           </a:p>
@@ -789,7 +759,22 @@
           </a:p>
           <a:p xmlns:a="http://schemas.openxmlformats.org/drawingml/2006/main">
             <a:r>
-              <a:t>Speaker cue: 8. Add model trials only after the oracle and task headroom exist</a:t>
+              <a:t>Presenter guidance</a:t>
+            </a:r>
+          </a:p>
+          <a:p xmlns:a="http://schemas.openxmlformats.org/drawingml/2006/main">
+            <a:r>
+              <a:t>Purpose: Place model trials after environment qualification.</a:t>
+            </a:r>
+          </a:p>
+          <a:p xmlns:a="http://schemas.openxmlformats.org/drawingml/2006/main">
+            <a:r>
+              <a:t>Explain: Use tasks with measured headroom, hold the entire evaluation cell fixed, and compare skill and control treatments only after the lane is stable.</a:t>
+            </a:r>
+          </a:p>
+          <a:p xmlns:a="http://schemas.openxmlformats.org/drawingml/2006/main">
+            <a:r>
+              <a:t>Emphasize: The oracle establishes execution integrity; it does not prove the skill helps or justify pooling results across environments.</a:t>
             </a:r>
           </a:p>
         </p:txBody>
@@ -864,7 +849,7 @@
           </a:p>
           <a:p xmlns:a="http://schemas.openxmlformats.org/drawingml/2006/main">
             <a:r>
-              <a:t>- https://github.com/uxlfoundation/skills/blob/main/docs/self-hosted-runners.md</a:t>
+              <a:t>- https://github.com/uxlfoundation/skills/blob/main/docs/target-device-adapter.md</a:t>
             </a:r>
           </a:p>
           <a:p xmlns:a="http://schemas.openxmlformats.org/drawingml/2006/main">
@@ -874,12 +859,7 @@
           </a:p>
           <a:p xmlns:a="http://schemas.openxmlformats.org/drawingml/2006/main">
             <a:r>
-              <a:t>- https://github.com/uxlfoundation/skills/tree/main/evaluation/runner-control-repo-template</a:t>
-            </a:r>
-          </a:p>
-          <a:p xmlns:a="http://schemas.openxmlformats.org/drawingml/2006/main">
-            <a:r>
-              <a:t>- https://github.com/uxlfoundation/skills/tree/main/scripts/runner</a:t>
+              <a:t>- https://github.com/uxlfoundation/skills/tree/main/evaluation/runner</a:t>
             </a:r>
           </a:p>
           <a:p xmlns:a="http://schemas.openxmlformats.org/drawingml/2006/main">
@@ -889,21 +869,6 @@
           </a:p>
           <a:p xmlns:a="http://schemas.openxmlformats.org/drawingml/2006/main">
             <a:r>
-              <a:t>- https://github.com/uxlfoundation/skills/blob/main/docs/forward-testing.md</a:t>
-            </a:r>
-          </a:p>
-          <a:p xmlns:a="http://schemas.openxmlformats.org/drawingml/2006/main">
-            <a:r>
-              <a:t>- https://github.com/uxlfoundation/skills/blob/main/docs/evaluator-operator-guide.md</a:t>
-            </a:r>
-          </a:p>
-          <a:p xmlns:a="http://schemas.openxmlformats.org/drawingml/2006/main">
-            <a:r>
-              <a:t>- https://github.com/uxlfoundation/skills/blob/main/.github/workflows/harbor-hardware.yml</a:t>
-            </a:r>
-          </a:p>
-          <a:p xmlns:a="http://schemas.openxmlformats.org/drawingml/2006/main">
-            <a:r>
               <a:t>[/Sources]</a:t>
             </a:r>
           </a:p>
@@ -914,7 +879,22 @@
           </a:p>
           <a:p xmlns:a="http://schemas.openxmlformats.org/drawingml/2006/main">
             <a:r>
-              <a:t>Speaker cue: Definition of done: a qualified lane, not a trusted black box</a:t>
+              <a:t>Presenter guidance</a:t>
+            </a:r>
+          </a:p>
+          <a:p xmlns:a="http://schemas.openxmlformats.org/drawingml/2006/main">
+            <a:r>
+              <a:t>Purpose: Define done for a new specialized target lane.</a:t>
+            </a:r>
+          </a:p>
+          <a:p xmlns:a="http://schemas.openxmlformats.org/drawingml/2006/main">
+            <a:r>
+              <a:t>Explain: The lane is reproducible, least-privilege, oracle-gated, reviewable, documented, owned, and able to produce schema-valid sanitized evidence.</a:t>
+            </a:r>
+          </a:p>
+          <a:p xmlns:a="http://schemas.openxmlformats.org/drawingml/2006/main">
+            <a:r>
+              <a:t>Emphasize: A named owner and explicit limitations are required; the project should not treat a private machine as an unexamined black box.</a:t>
             </a:r>
           </a:p>
         </p:txBody>
@@ -989,7 +969,7 @@
           </a:p>
           <a:p xmlns:a="http://schemas.openxmlformats.org/drawingml/2006/main">
             <a:r>
-              <a:t>- https://github.com/uxlfoundation/skills/blob/main/docs/self-hosted-runners.md</a:t>
+              <a:t>- https://github.com/uxlfoundation/skills/blob/main/docs/target-device-adapter.md</a:t>
             </a:r>
           </a:p>
           <a:p xmlns:a="http://schemas.openxmlformats.org/drawingml/2006/main">
@@ -999,12 +979,7 @@
           </a:p>
           <a:p xmlns:a="http://schemas.openxmlformats.org/drawingml/2006/main">
             <a:r>
-              <a:t>- https://github.com/uxlfoundation/skills/tree/main/evaluation/runner-control-repo-template</a:t>
-            </a:r>
-          </a:p>
-          <a:p xmlns:a="http://schemas.openxmlformats.org/drawingml/2006/main">
-            <a:r>
-              <a:t>- https://github.com/uxlfoundation/skills/tree/main/scripts/runner</a:t>
+              <a:t>- https://github.com/uxlfoundation/skills/tree/main/evaluation/runner</a:t>
             </a:r>
           </a:p>
           <a:p xmlns:a="http://schemas.openxmlformats.org/drawingml/2006/main">
@@ -1014,21 +989,6 @@
           </a:p>
           <a:p xmlns:a="http://schemas.openxmlformats.org/drawingml/2006/main">
             <a:r>
-              <a:t>- https://github.com/uxlfoundation/skills/blob/main/docs/forward-testing.md</a:t>
-            </a:r>
-          </a:p>
-          <a:p xmlns:a="http://schemas.openxmlformats.org/drawingml/2006/main">
-            <a:r>
-              <a:t>- https://github.com/uxlfoundation/skills/blob/main/docs/evaluator-operator-guide.md</a:t>
-            </a:r>
-          </a:p>
-          <a:p xmlns:a="http://schemas.openxmlformats.org/drawingml/2006/main">
-            <a:r>
-              <a:t>- https://github.com/uxlfoundation/skills/blob/main/.github/workflows/harbor-hardware.yml</a:t>
-            </a:r>
-          </a:p>
-          <a:p xmlns:a="http://schemas.openxmlformats.org/drawingml/2006/main">
-            <a:r>
               <a:t>[/Sources]</a:t>
             </a:r>
           </a:p>
@@ -1039,7 +999,22 @@
           </a:p>
           <a:p xmlns:a="http://schemas.openxmlformats.org/drawingml/2006/main">
             <a:r>
-              <a:t>Speaker cue: A target adapter has five parts — and one shared evidence contract</a:t>
+              <a:t>Presenter guidance</a:t>
+            </a:r>
+          </a:p>
+          <a:p xmlns:a="http://schemas.openxmlformats.org/drawingml/2006/main">
+            <a:r>
+              <a:t>Purpose: Name the five pieces that make a target lane trustworthy.</a:t>
+            </a:r>
+          </a:p>
+          <a:p xmlns:a="http://schemas.openxmlformats.org/drawingml/2006/main">
+            <a:r>
+              <a:t>Explain: A public task, target adapter, machine registration, hardware oracle, and reviewable evidence bundle work together as one contract.</a:t>
+            </a:r>
+          </a:p>
+          <a:p xmlns:a="http://schemas.openxmlformats.org/drawingml/2006/main">
+            <a:r>
+              <a:t>Emphasize: A reachable runner alone is not a qualified lane.</a:t>
             </a:r>
           </a:p>
         </p:txBody>
@@ -1114,7 +1089,7 @@
           </a:p>
           <a:p xmlns:a="http://schemas.openxmlformats.org/drawingml/2006/main">
             <a:r>
-              <a:t>- https://github.com/uxlfoundation/skills/blob/main/docs/self-hosted-runners.md</a:t>
+              <a:t>- https://github.com/uxlfoundation/skills/blob/main/docs/target-device-adapter.md</a:t>
             </a:r>
           </a:p>
           <a:p xmlns:a="http://schemas.openxmlformats.org/drawingml/2006/main">
@@ -1124,12 +1099,7 @@
           </a:p>
           <a:p xmlns:a="http://schemas.openxmlformats.org/drawingml/2006/main">
             <a:r>
-              <a:t>- https://github.com/uxlfoundation/skills/tree/main/evaluation/runner-control-repo-template</a:t>
-            </a:r>
-          </a:p>
-          <a:p xmlns:a="http://schemas.openxmlformats.org/drawingml/2006/main">
-            <a:r>
-              <a:t>- https://github.com/uxlfoundation/skills/tree/main/scripts/runner</a:t>
+              <a:t>- https://github.com/uxlfoundation/skills/tree/main/evaluation/runner</a:t>
             </a:r>
           </a:p>
           <a:p xmlns:a="http://schemas.openxmlformats.org/drawingml/2006/main">
@@ -1139,21 +1109,6 @@
           </a:p>
           <a:p xmlns:a="http://schemas.openxmlformats.org/drawingml/2006/main">
             <a:r>
-              <a:t>- https://github.com/uxlfoundation/skills/blob/main/docs/forward-testing.md</a:t>
-            </a:r>
-          </a:p>
-          <a:p xmlns:a="http://schemas.openxmlformats.org/drawingml/2006/main">
-            <a:r>
-              <a:t>- https://github.com/uxlfoundation/skills/blob/main/docs/evaluator-operator-guide.md</a:t>
-            </a:r>
-          </a:p>
-          <a:p xmlns:a="http://schemas.openxmlformats.org/drawingml/2006/main">
-            <a:r>
-              <a:t>- https://github.com/uxlfoundation/skills/blob/main/.github/workflows/harbor-hardware.yml</a:t>
-            </a:r>
-          </a:p>
-          <a:p xmlns:a="http://schemas.openxmlformats.org/drawingml/2006/main">
-            <a:r>
               <a:t>[/Sources]</a:t>
             </a:r>
           </a:p>
@@ -1164,7 +1119,22 @@
           </a:p>
           <a:p xmlns:a="http://schemas.openxmlformats.org/drawingml/2006/main">
             <a:r>
-              <a:t>Speaker cue: 1. Write the capability contract before touching the runner</a:t>
+              <a:t>Presenter guidance</a:t>
+            </a:r>
+          </a:p>
+          <a:p xmlns:a="http://schemas.openxmlformats.org/drawingml/2006/main">
+            <a:r>
+              <a:t>Purpose: Explain the capability contract that the machine owner must publish.</a:t>
+            </a:r>
+          </a:p>
+          <a:p xmlns:a="http://schemas.openxmlformats.org/drawingml/2006/main">
+            <a:r>
+              <a:t>Explain: Labels identify the target; provenance records software and hardware; an allowlist scopes tasks; limitations state what the lane cannot establish.</a:t>
+            </a:r>
+          </a:p>
+          <a:p xmlns:a="http://schemas.openxmlformats.org/drawingml/2006/main">
+            <a:r>
+              <a:t>Emphasize: Use observable capabilities and constraints rather than vendor marketing names as the contract.</a:t>
             </a:r>
           </a:p>
         </p:txBody>
@@ -1239,7 +1209,7 @@
           </a:p>
           <a:p xmlns:a="http://schemas.openxmlformats.org/drawingml/2006/main">
             <a:r>
-              <a:t>- https://github.com/uxlfoundation/skills/blob/main/docs/self-hosted-runners.md</a:t>
+              <a:t>- https://github.com/uxlfoundation/skills/blob/main/docs/target-device-adapter.md</a:t>
             </a:r>
           </a:p>
           <a:p xmlns:a="http://schemas.openxmlformats.org/drawingml/2006/main">
@@ -1249,12 +1219,7 @@
           </a:p>
           <a:p xmlns:a="http://schemas.openxmlformats.org/drawingml/2006/main">
             <a:r>
-              <a:t>- https://github.com/uxlfoundation/skills/tree/main/evaluation/runner-control-repo-template</a:t>
-            </a:r>
-          </a:p>
-          <a:p xmlns:a="http://schemas.openxmlformats.org/drawingml/2006/main">
-            <a:r>
-              <a:t>- https://github.com/uxlfoundation/skills/tree/main/scripts/runner</a:t>
+              <a:t>- https://github.com/uxlfoundation/skills/tree/main/evaluation/runner</a:t>
             </a:r>
           </a:p>
           <a:p xmlns:a="http://schemas.openxmlformats.org/drawingml/2006/main">
@@ -1264,21 +1229,6 @@
           </a:p>
           <a:p xmlns:a="http://schemas.openxmlformats.org/drawingml/2006/main">
             <a:r>
-              <a:t>- https://github.com/uxlfoundation/skills/blob/main/docs/forward-testing.md</a:t>
-            </a:r>
-          </a:p>
-          <a:p xmlns:a="http://schemas.openxmlformats.org/drawingml/2006/main">
-            <a:r>
-              <a:t>- https://github.com/uxlfoundation/skills/blob/main/docs/evaluator-operator-guide.md</a:t>
-            </a:r>
-          </a:p>
-          <a:p xmlns:a="http://schemas.openxmlformats.org/drawingml/2006/main">
-            <a:r>
-              <a:t>- https://github.com/uxlfoundation/skills/blob/main/.github/workflows/harbor-hardware.yml</a:t>
-            </a:r>
-          </a:p>
-          <a:p xmlns:a="http://schemas.openxmlformats.org/drawingml/2006/main">
-            <a:r>
               <a:t>[/Sources]</a:t>
             </a:r>
           </a:p>
@@ -1289,7 +1239,22 @@
           </a:p>
           <a:p xmlns:a="http://schemas.openxmlformats.org/drawingml/2006/main">
             <a:r>
-              <a:t>Speaker cue: 2. Add four public, reviewable pieces</a:t>
+              <a:t>Presenter guidance</a:t>
+            </a:r>
+          </a:p>
+          <a:p xmlns:a="http://schemas.openxmlformats.org/drawingml/2006/main">
+            <a:r>
+              <a:t>Purpose: Separate the public integration surface from machine-specific configuration.</a:t>
+            </a:r>
+          </a:p>
+          <a:p xmlns:a="http://schemas.openxmlformats.org/drawingml/2006/main">
+            <a:r>
+              <a:t>Explain: Tasks, schemas, qualification records, and reviewed adapter behavior live in the public repository; credentials and dispatch controls remain private.</a:t>
+            </a:r>
+          </a:p>
+          <a:p xmlns:a="http://schemas.openxmlformats.org/drawingml/2006/main">
+            <a:r>
+              <a:t>Emphasize: Keeping the public surface small makes a new target easier to review and reproduce.</a:t>
             </a:r>
           </a:p>
         </p:txBody>
@@ -1364,7 +1329,7 @@
           </a:p>
           <a:p xmlns:a="http://schemas.openxmlformats.org/drawingml/2006/main">
             <a:r>
-              <a:t>- https://github.com/uxlfoundation/skills/blob/main/docs/self-hosted-runners.md</a:t>
+              <a:t>- https://github.com/uxlfoundation/skills/blob/main/docs/target-device-adapter.md</a:t>
             </a:r>
           </a:p>
           <a:p xmlns:a="http://schemas.openxmlformats.org/drawingml/2006/main">
@@ -1374,12 +1339,7 @@
           </a:p>
           <a:p xmlns:a="http://schemas.openxmlformats.org/drawingml/2006/main">
             <a:r>
-              <a:t>- https://github.com/uxlfoundation/skills/tree/main/evaluation/runner-control-repo-template</a:t>
-            </a:r>
-          </a:p>
-          <a:p xmlns:a="http://schemas.openxmlformats.org/drawingml/2006/main">
-            <a:r>
-              <a:t>- https://github.com/uxlfoundation/skills/tree/main/scripts/runner</a:t>
+              <a:t>- https://github.com/uxlfoundation/skills/tree/main/evaluation/runner</a:t>
             </a:r>
           </a:p>
           <a:p xmlns:a="http://schemas.openxmlformats.org/drawingml/2006/main">
@@ -1389,21 +1349,6 @@
           </a:p>
           <a:p xmlns:a="http://schemas.openxmlformats.org/drawingml/2006/main">
             <a:r>
-              <a:t>- https://github.com/uxlfoundation/skills/blob/main/docs/forward-testing.md</a:t>
-            </a:r>
-          </a:p>
-          <a:p xmlns:a="http://schemas.openxmlformats.org/drawingml/2006/main">
-            <a:r>
-              <a:t>- https://github.com/uxlfoundation/skills/blob/main/docs/evaluator-operator-guide.md</a:t>
-            </a:r>
-          </a:p>
-          <a:p xmlns:a="http://schemas.openxmlformats.org/drawingml/2006/main">
-            <a:r>
-              <a:t>- https://github.com/uxlfoundation/skills/blob/main/.github/workflows/harbor-hardware.yml</a:t>
-            </a:r>
-          </a:p>
-          <a:p xmlns:a="http://schemas.openxmlformats.org/drawingml/2006/main">
-            <a:r>
               <a:t>[/Sources]</a:t>
             </a:r>
           </a:p>
@@ -1414,7 +1359,22 @@
           </a:p>
           <a:p xmlns:a="http://schemas.openxmlformats.org/drawingml/2006/main">
             <a:r>
-              <a:t>Speaker cue: 3. Make the oracle prove the real execution path</a:t>
+              <a:t>Presenter guidance</a:t>
+            </a:r>
+          </a:p>
+          <a:p xmlns:a="http://schemas.openxmlformats.org/drawingml/2006/main">
+            <a:r>
+              <a:t>Purpose: Describe the hardware oracle and why it gates evaluation.</a:t>
+            </a:r>
+          </a:p>
+          <a:p xmlns:a="http://schemas.openxmlformats.org/drawingml/2006/main">
+            <a:r>
+              <a:t>Explain: The oracle verifies the requested source revision, records the host, maps the intended device, runs a minimal workload, and proves the result is correct.</a:t>
+            </a:r>
+          </a:p>
+          <a:p xmlns:a="http://schemas.openxmlformats.org/drawingml/2006/main">
+            <a:r>
+              <a:t>Emphasize: No model trial should run until the oracle shows that the requested target—not a fallback device—actually executed.</a:t>
             </a:r>
           </a:p>
         </p:txBody>
@@ -1489,7 +1449,7 @@
           </a:p>
           <a:p xmlns:a="http://schemas.openxmlformats.org/drawingml/2006/main">
             <a:r>
-              <a:t>- https://github.com/uxlfoundation/skills/blob/main/docs/self-hosted-runners.md</a:t>
+              <a:t>- https://github.com/uxlfoundation/skills/blob/main/docs/target-device-adapter.md</a:t>
             </a:r>
           </a:p>
           <a:p xmlns:a="http://schemas.openxmlformats.org/drawingml/2006/main">
@@ -1499,12 +1459,7 @@
           </a:p>
           <a:p xmlns:a="http://schemas.openxmlformats.org/drawingml/2006/main">
             <a:r>
-              <a:t>- https://github.com/uxlfoundation/skills/tree/main/evaluation/runner-control-repo-template</a:t>
-            </a:r>
-          </a:p>
-          <a:p xmlns:a="http://schemas.openxmlformats.org/drawingml/2006/main">
-            <a:r>
-              <a:t>- https://github.com/uxlfoundation/skills/tree/main/scripts/runner</a:t>
+              <a:t>- https://github.com/uxlfoundation/skills/tree/main/evaluation/runner</a:t>
             </a:r>
           </a:p>
           <a:p xmlns:a="http://schemas.openxmlformats.org/drawingml/2006/main">
@@ -1514,21 +1469,6 @@
           </a:p>
           <a:p xmlns:a="http://schemas.openxmlformats.org/drawingml/2006/main">
             <a:r>
-              <a:t>- https://github.com/uxlfoundation/skills/blob/main/docs/forward-testing.md</a:t>
-            </a:r>
-          </a:p>
-          <a:p xmlns:a="http://schemas.openxmlformats.org/drawingml/2006/main">
-            <a:r>
-              <a:t>- https://github.com/uxlfoundation/skills/blob/main/docs/evaluator-operator-guide.md</a:t>
-            </a:r>
-          </a:p>
-          <a:p xmlns:a="http://schemas.openxmlformats.org/drawingml/2006/main">
-            <a:r>
-              <a:t>- https://github.com/uxlfoundation/skills/blob/main/.github/workflows/harbor-hardware.yml</a:t>
-            </a:r>
-          </a:p>
-          <a:p xmlns:a="http://schemas.openxmlformats.org/drawingml/2006/main">
-            <a:r>
               <a:t>[/Sources]</a:t>
             </a:r>
           </a:p>
@@ -1539,7 +1479,22 @@
           </a:p>
           <a:p xmlns:a="http://schemas.openxmlformats.org/drawingml/2006/main">
             <a:r>
-              <a:t>Speaker cue: 4. Keep dispatch in a small private control repository</a:t>
+              <a:t>Presenter guidance</a:t>
+            </a:r>
+          </a:p>
+          <a:p xmlns:a="http://schemas.openxmlformats.org/drawingml/2006/main">
+            <a:r>
+              <a:t>Purpose: Explain why dispatch and secrets belong in a private control plane.</a:t>
+            </a:r>
+          </a:p>
+          <a:p xmlns:a="http://schemas.openxmlformats.org/drawingml/2006/main">
+            <a:r>
+              <a:t>Explain: The public repository defines what to run and what evidence to return; the private control repository stores machine enrollment, credentials, and restricted workflow details.</a:t>
+            </a:r>
+          </a:p>
+          <a:p xmlns:a="http://schemas.openxmlformats.org/drawingml/2006/main">
+            <a:r>
+              <a:t>Emphasize: Private control protects the machine without making task definitions or accepted evidence opaque.</a:t>
             </a:r>
           </a:p>
         </p:txBody>
@@ -1614,7 +1569,7 @@
           </a:p>
           <a:p xmlns:a="http://schemas.openxmlformats.org/drawingml/2006/main">
             <a:r>
-              <a:t>- https://github.com/uxlfoundation/skills/blob/main/docs/self-hosted-runners.md</a:t>
+              <a:t>- https://github.com/uxlfoundation/skills/blob/main/docs/target-device-adapter.md</a:t>
             </a:r>
           </a:p>
           <a:p xmlns:a="http://schemas.openxmlformats.org/drawingml/2006/main">
@@ -1624,12 +1579,7 @@
           </a:p>
           <a:p xmlns:a="http://schemas.openxmlformats.org/drawingml/2006/main">
             <a:r>
-              <a:t>- https://github.com/uxlfoundation/skills/tree/main/evaluation/runner-control-repo-template</a:t>
-            </a:r>
-          </a:p>
-          <a:p xmlns:a="http://schemas.openxmlformats.org/drawingml/2006/main">
-            <a:r>
-              <a:t>- https://github.com/uxlfoundation/skills/tree/main/scripts/runner</a:t>
+              <a:t>- https://github.com/uxlfoundation/skills/tree/main/evaluation/runner</a:t>
             </a:r>
           </a:p>
           <a:p xmlns:a="http://schemas.openxmlformats.org/drawingml/2006/main">
@@ -1639,21 +1589,6 @@
           </a:p>
           <a:p xmlns:a="http://schemas.openxmlformats.org/drawingml/2006/main">
             <a:r>
-              <a:t>- https://github.com/uxlfoundation/skills/blob/main/docs/forward-testing.md</a:t>
-            </a:r>
-          </a:p>
-          <a:p xmlns:a="http://schemas.openxmlformats.org/drawingml/2006/main">
-            <a:r>
-              <a:t>- https://github.com/uxlfoundation/skills/blob/main/docs/evaluator-operator-guide.md</a:t>
-            </a:r>
-          </a:p>
-          <a:p xmlns:a="http://schemas.openxmlformats.org/drawingml/2006/main">
-            <a:r>
-              <a:t>- https://github.com/uxlfoundation/skills/blob/main/.github/workflows/harbor-hardware.yml</a:t>
-            </a:r>
-          </a:p>
-          <a:p xmlns:a="http://schemas.openxmlformats.org/drawingml/2006/main">
-            <a:r>
               <a:t>[/Sources]</a:t>
             </a:r>
           </a:p>
@@ -1664,7 +1599,22 @@
           </a:p>
           <a:p xmlns:a="http://schemas.openxmlformats.org/drawingml/2006/main">
             <a:r>
-              <a:t>Speaker cue: 5. Prepare the machine, then register one ephemeral job</a:t>
+              <a:t>Presenter guidance</a:t>
+            </a:r>
+          </a:p>
+          <a:p xmlns:a="http://schemas.openxmlformats.org/drawingml/2006/main">
+            <a:r>
+              <a:t>Purpose: Walk through safe machine preparation and runner registration.</a:t>
+            </a:r>
+          </a:p>
+          <a:p xmlns:a="http://schemas.openxmlformats.org/drawingml/2006/main">
+            <a:r>
+              <a:t>Explain: Create a least-privilege account, pin required software, isolate the workspace, register ephemerally with narrow labels, and make reboot recovery unambiguous.</a:t>
+            </a:r>
+          </a:p>
+          <a:p xmlns:a="http://schemas.openxmlformats.org/drawingml/2006/main">
+            <a:r>
+              <a:t>Emphasize: The machine owner must be able to stop the service and revoke access independently of the public repository.</a:t>
             </a:r>
           </a:p>
         </p:txBody>
@@ -1739,7 +1689,7 @@
           </a:p>
           <a:p xmlns:a="http://schemas.openxmlformats.org/drawingml/2006/main">
             <a:r>
-              <a:t>- https://github.com/uxlfoundation/skills/blob/main/docs/self-hosted-runners.md</a:t>
+              <a:t>- https://github.com/uxlfoundation/skills/blob/main/docs/target-device-adapter.md</a:t>
             </a:r>
           </a:p>
           <a:p xmlns:a="http://schemas.openxmlformats.org/drawingml/2006/main">
@@ -1749,12 +1699,7 @@
           </a:p>
           <a:p xmlns:a="http://schemas.openxmlformats.org/drawingml/2006/main">
             <a:r>
-              <a:t>- https://github.com/uxlfoundation/skills/tree/main/evaluation/runner-control-repo-template</a:t>
-            </a:r>
-          </a:p>
-          <a:p xmlns:a="http://schemas.openxmlformats.org/drawingml/2006/main">
-            <a:r>
-              <a:t>- https://github.com/uxlfoundation/skills/tree/main/scripts/runner</a:t>
+              <a:t>- https://github.com/uxlfoundation/skills/tree/main/evaluation/runner</a:t>
             </a:r>
           </a:p>
           <a:p xmlns:a="http://schemas.openxmlformats.org/drawingml/2006/main">
@@ -1764,21 +1709,6 @@
           </a:p>
           <a:p xmlns:a="http://schemas.openxmlformats.org/drawingml/2006/main">
             <a:r>
-              <a:t>- https://github.com/uxlfoundation/skills/blob/main/docs/forward-testing.md</a:t>
-            </a:r>
-          </a:p>
-          <a:p xmlns:a="http://schemas.openxmlformats.org/drawingml/2006/main">
-            <a:r>
-              <a:t>- https://github.com/uxlfoundation/skills/blob/main/docs/evaluator-operator-guide.md</a:t>
-            </a:r>
-          </a:p>
-          <a:p xmlns:a="http://schemas.openxmlformats.org/drawingml/2006/main">
-            <a:r>
-              <a:t>- https://github.com/uxlfoundation/skills/blob/main/.github/workflows/harbor-hardware.yml</a:t>
-            </a:r>
-          </a:p>
-          <a:p xmlns:a="http://schemas.openxmlformats.org/drawingml/2006/main">
-            <a:r>
               <a:t>[/Sources]</a:t>
             </a:r>
           </a:p>
@@ -1789,7 +1719,22 @@
           </a:p>
           <a:p xmlns:a="http://schemas.openxmlformats.org/drawingml/2006/main">
             <a:r>
-              <a:t>Speaker cue: 6. Dispatch a reviewed commit and require the oracle gate</a:t>
+              <a:t>Presenter guidance</a:t>
+            </a:r>
+          </a:p>
+          <a:p xmlns:a="http://schemas.openxmlformats.org/drawingml/2006/main">
+            <a:r>
+              <a:t>Purpose: Explain the reviewed workflow that reaches the target.</a:t>
+            </a:r>
+          </a:p>
+          <a:p xmlns:a="http://schemas.openxmlformats.org/drawingml/2006/main">
+            <a:r>
+              <a:t>Explain: A workflow dispatch selects an immutable commit and declared adapter; the runner verifies both before the oracle and Harbor execution begin.</a:t>
+            </a:r>
+          </a:p>
+          <a:p xmlns:a="http://schemas.openxmlformats.org/drawingml/2006/main">
+            <a:r>
+              <a:t>Emphasize: Do not allow arbitrary repository code or unreviewed commands to execute merely because a job can reach the runner.</a:t>
             </a:r>
           </a:p>
         </p:txBody>
@@ -1864,7 +1809,7 @@
           </a:p>
           <a:p xmlns:a="http://schemas.openxmlformats.org/drawingml/2006/main">
             <a:r>
-              <a:t>- https://github.com/uxlfoundation/skills/blob/main/docs/self-hosted-runners.md</a:t>
+              <a:t>- https://github.com/uxlfoundation/skills/blob/main/docs/target-device-adapter.md</a:t>
             </a:r>
           </a:p>
           <a:p xmlns:a="http://schemas.openxmlformats.org/drawingml/2006/main">
@@ -1874,12 +1819,7 @@
           </a:p>
           <a:p xmlns:a="http://schemas.openxmlformats.org/drawingml/2006/main">
             <a:r>
-              <a:t>- https://github.com/uxlfoundation/skills/tree/main/evaluation/runner-control-repo-template</a:t>
-            </a:r>
-          </a:p>
-          <a:p xmlns:a="http://schemas.openxmlformats.org/drawingml/2006/main">
-            <a:r>
-              <a:t>- https://github.com/uxlfoundation/skills/tree/main/scripts/runner</a:t>
+              <a:t>- https://github.com/uxlfoundation/skills/tree/main/evaluation/runner</a:t>
             </a:r>
           </a:p>
           <a:p xmlns:a="http://schemas.openxmlformats.org/drawingml/2006/main">
@@ -1889,21 +1829,6 @@
           </a:p>
           <a:p xmlns:a="http://schemas.openxmlformats.org/drawingml/2006/main">
             <a:r>
-              <a:t>- https://github.com/uxlfoundation/skills/blob/main/docs/forward-testing.md</a:t>
-            </a:r>
-          </a:p>
-          <a:p xmlns:a="http://schemas.openxmlformats.org/drawingml/2006/main">
-            <a:r>
-              <a:t>- https://github.com/uxlfoundation/skills/blob/main/docs/evaluator-operator-guide.md</a:t>
-            </a:r>
-          </a:p>
-          <a:p xmlns:a="http://schemas.openxmlformats.org/drawingml/2006/main">
-            <a:r>
-              <a:t>- https://github.com/uxlfoundation/skills/blob/main/.github/workflows/harbor-hardware.yml</a:t>
-            </a:r>
-          </a:p>
-          <a:p xmlns:a="http://schemas.openxmlformats.org/drawingml/2006/main">
-            <a:r>
               <a:t>[/Sources]</a:t>
             </a:r>
           </a:p>
@@ -1914,7 +1839,22 @@
           </a:p>
           <a:p xmlns:a="http://schemas.openxmlformats.org/drawingml/2006/main">
             <a:r>
-              <a:t>Speaker cue: The operator runs one short, reviewable sequence</a:t>
+              <a:t>Presenter guidance</a:t>
+            </a:r>
+          </a:p>
+          <a:p xmlns:a="http://schemas.openxmlformats.org/drawingml/2006/main">
+            <a:r>
+              <a:t>Purpose: Describe the operator's end-to-end run sequence.</a:t>
+            </a:r>
+          </a:p>
+          <a:p xmlns:a="http://schemas.openxmlformats.org/drawingml/2006/main">
+            <a:r>
+              <a:t>Explain: Start or resume the runner, dispatch the approved workflow, watch the oracle gate, preserve the complete artifact ZIP, then clean the ephemeral workspace.</a:t>
+            </a:r>
+          </a:p>
+          <a:p xmlns:a="http://schemas.openxmlformats.org/drawingml/2006/main">
+            <a:r>
+              <a:t>Emphasize: Preserve evidence before troubleshooting or cleanup so a failed run remains diagnosable.</a:t>
             </a:r>
           </a:p>
         </p:txBody>
@@ -1950,7 +1890,7 @@
     <p:bg>
       <p:bgPr>
         <a:blipFill xmlns:a="http://schemas.openxmlformats.org/drawingml/2006/main">
-          <a:blip xmlns:r="http://schemas.openxmlformats.org/officeDocument/2006/relationships" r:embed="R7dfd65bce3264583">
+          <a:blip xmlns:r="http://schemas.openxmlformats.org/officeDocument/2006/relationships" r:embed="R3c7a433f6cf44404">
             <a:alphaModFix/>
           </a:blip>
           <a:stretch>
@@ -2385,7 +2325,7 @@
           <p:nvPr/>
         </p:nvPicPr>
         <p:blipFill rotWithShape="1">
-          <a:blip xmlns:r="http://schemas.openxmlformats.org/officeDocument/2006/relationships" xmlns:a="http://schemas.openxmlformats.org/drawingml/2006/main" r:embed="R15ac037aed214361">
+          <a:blip xmlns:r="http://schemas.openxmlformats.org/officeDocument/2006/relationships" xmlns:a="http://schemas.openxmlformats.org/drawingml/2006/main" r:embed="R423bfb2cc1a74d97">
             <a:alphaModFix/>
           </a:blip>
           <a:srcRect xmlns:a="http://schemas.openxmlformats.org/drawingml/2006/main" l="0" t="0" r="0" b="0"/>
@@ -2415,7 +2355,7 @@
     <p:bg>
       <p:bgPr>
         <a:blipFill xmlns:a="http://schemas.openxmlformats.org/drawingml/2006/main">
-          <a:blip xmlns:r="http://schemas.openxmlformats.org/officeDocument/2006/relationships" r:embed="R59f59971c04944ba">
+          <a:blip xmlns:r="http://schemas.openxmlformats.org/officeDocument/2006/relationships" r:embed="R46c29e7156b94c73">
             <a:alphaModFix/>
           </a:blip>
           <a:stretch>
@@ -3449,7 +3389,7 @@
           <p:nvPr/>
         </p:nvPicPr>
         <p:blipFill rotWithShape="1">
-          <a:blip xmlns:r="http://schemas.openxmlformats.org/officeDocument/2006/relationships" xmlns:a="http://schemas.openxmlformats.org/drawingml/2006/main" r:embed="R880e5a9b0496437e">
+          <a:blip xmlns:r="http://schemas.openxmlformats.org/officeDocument/2006/relationships" xmlns:a="http://schemas.openxmlformats.org/drawingml/2006/main" r:embed="R4bc3e3cf0727422a">
             <a:alphaModFix/>
           </a:blip>
           <a:srcRect xmlns:a="http://schemas.openxmlformats.org/drawingml/2006/main" l="0" t="0" r="0" b="0"/>
@@ -4473,7 +4413,7 @@
           <p:nvPr/>
         </p:nvPicPr>
         <p:blipFill rotWithShape="1">
-          <a:blip xmlns:r="http://schemas.openxmlformats.org/officeDocument/2006/relationships" xmlns:a="http://schemas.openxmlformats.org/drawingml/2006/main" r:embed="R024167c996b7411f">
+          <a:blip xmlns:r="http://schemas.openxmlformats.org/officeDocument/2006/relationships" xmlns:a="http://schemas.openxmlformats.org/drawingml/2006/main" r:embed="R528befa722c44434">
             <a:alphaModFix/>
           </a:blip>
           <a:srcRect xmlns:a="http://schemas.openxmlformats.org/drawingml/2006/main" l="0" t="0" r="0" b="0"/>
@@ -4503,7 +4443,7 @@
     <p:bg>
       <p:bgPr>
         <a:blipFill xmlns:a="http://schemas.openxmlformats.org/drawingml/2006/main">
-          <a:blip xmlns:r="http://schemas.openxmlformats.org/officeDocument/2006/relationships" r:embed="R8d66bf1c2fe441fe">
+          <a:blip xmlns:r="http://schemas.openxmlformats.org/officeDocument/2006/relationships" r:embed="R25e9643399a6416e">
             <a:alphaModFix/>
           </a:blip>
           <a:stretch>
@@ -5777,7 +5717,7 @@
           <p:nvPr/>
         </p:nvPicPr>
         <p:blipFill rotWithShape="1">
-          <a:blip xmlns:r="http://schemas.openxmlformats.org/officeDocument/2006/relationships" xmlns:a="http://schemas.openxmlformats.org/drawingml/2006/main" r:embed="R5835b3e7e78c40be">
+          <a:blip xmlns:r="http://schemas.openxmlformats.org/officeDocument/2006/relationships" xmlns:a="http://schemas.openxmlformats.org/drawingml/2006/main" r:embed="R2ebb44715ea5428c">
             <a:alphaModFix/>
           </a:blip>
           <a:srcRect xmlns:a="http://schemas.openxmlformats.org/drawingml/2006/main" l="0" t="0" r="0" b="0"/>
@@ -9021,7 +8961,7 @@
           <p:nvPr/>
         </p:nvPicPr>
         <p:blipFill rotWithShape="1">
-          <a:blip xmlns:r="http://schemas.openxmlformats.org/officeDocument/2006/relationships" xmlns:a="http://schemas.openxmlformats.org/drawingml/2006/main" r:embed="R76da4e82ed7b4231">
+          <a:blip xmlns:r="http://schemas.openxmlformats.org/officeDocument/2006/relationships" xmlns:a="http://schemas.openxmlformats.org/drawingml/2006/main" r:embed="Re1fffc62fbc04e79">
             <a:alphaModFix/>
           </a:blip>
           <a:srcRect xmlns:a="http://schemas.openxmlformats.org/drawingml/2006/main" l="0" t="0" r="0" b="0"/>
@@ -10759,7 +10699,7 @@
           <p:nvPr/>
         </p:nvPicPr>
         <p:blipFill rotWithShape="1">
-          <a:blip xmlns:r="http://schemas.openxmlformats.org/officeDocument/2006/relationships" xmlns:a="http://schemas.openxmlformats.org/drawingml/2006/main" r:embed="R50d96cebe0ae46f6">
+          <a:blip xmlns:r="http://schemas.openxmlformats.org/officeDocument/2006/relationships" xmlns:a="http://schemas.openxmlformats.org/drawingml/2006/main" r:embed="R1e3c1230c68747df">
             <a:alphaModFix/>
           </a:blip>
           <a:srcRect xmlns:a="http://schemas.openxmlformats.org/drawingml/2006/main" l="0" t="0" r="0" b="0"/>
@@ -17588,7 +17528,7 @@
     <p:bg>
       <p:bgPr>
         <a:blipFill xmlns:a="http://schemas.openxmlformats.org/drawingml/2006/main">
-          <a:blip xmlns:r="http://schemas.openxmlformats.org/officeDocument/2006/relationships" r:embed="R24be5fe9329e43a7">
+          <a:blip xmlns:r="http://schemas.openxmlformats.org/officeDocument/2006/relationships" r:embed="Rbb522b5a67304b26">
             <a:alphaModFix/>
           </a:blip>
           <a:stretch>
@@ -18023,7 +17963,7 @@
           <p:nvPr/>
         </p:nvPicPr>
         <p:blipFill rotWithShape="1">
-          <a:blip xmlns:r="http://schemas.openxmlformats.org/officeDocument/2006/relationships" xmlns:a="http://schemas.openxmlformats.org/drawingml/2006/main" r:embed="R35c054a1429742fe">
+          <a:blip xmlns:r="http://schemas.openxmlformats.org/officeDocument/2006/relationships" xmlns:a="http://schemas.openxmlformats.org/drawingml/2006/main" r:embed="Ra152790c713c49dc">
             <a:alphaModFix/>
           </a:blip>
           <a:srcRect xmlns:a="http://schemas.openxmlformats.org/drawingml/2006/main" l="0" t="0" r="0" b="0"/>
@@ -18053,7 +17993,7 @@
     <p:bg>
       <p:bgPr>
         <a:blipFill xmlns:a="http://schemas.openxmlformats.org/drawingml/2006/main">
-          <a:blip xmlns:r="http://schemas.openxmlformats.org/officeDocument/2006/relationships" r:embed="Re41c354425834008">
+          <a:blip xmlns:r="http://schemas.openxmlformats.org/officeDocument/2006/relationships" r:embed="Rf74f5ff001544c9b">
             <a:alphaModFix/>
           </a:blip>
           <a:stretch>
@@ -18686,7 +18626,7 @@
           <p:nvPr/>
         </p:nvPicPr>
         <p:blipFill rotWithShape="1">
-          <a:blip xmlns:r="http://schemas.openxmlformats.org/officeDocument/2006/relationships" xmlns:a="http://schemas.openxmlformats.org/drawingml/2006/main" r:embed="Rdbf7a0e053354cca">
+          <a:blip xmlns:r="http://schemas.openxmlformats.org/officeDocument/2006/relationships" xmlns:a="http://schemas.openxmlformats.org/drawingml/2006/main" r:embed="R37679fa5392c4c54">
             <a:alphaModFix/>
           </a:blip>
           <a:srcRect xmlns:a="http://schemas.openxmlformats.org/drawingml/2006/main" l="0" t="0" r="0" b="0"/>
@@ -19146,7 +19086,7 @@
     <p:bg>
       <p:bgPr>
         <a:blipFill xmlns:a="http://schemas.openxmlformats.org/drawingml/2006/main">
-          <a:blip xmlns:r="http://schemas.openxmlformats.org/officeDocument/2006/relationships" r:embed="Ref234a457f1e4ebe">
+          <a:blip xmlns:r="http://schemas.openxmlformats.org/officeDocument/2006/relationships" r:embed="R14cd702e2786441e">
             <a:alphaModFix/>
           </a:blip>
           <a:stretch>
@@ -19779,7 +19719,7 @@
           <p:nvPr/>
         </p:nvPicPr>
         <p:blipFill rotWithShape="1">
-          <a:blip xmlns:r="http://schemas.openxmlformats.org/officeDocument/2006/relationships" xmlns:a="http://schemas.openxmlformats.org/drawingml/2006/main" r:embed="Rdb08bf9f7ee84f94">
+          <a:blip xmlns:r="http://schemas.openxmlformats.org/officeDocument/2006/relationships" xmlns:a="http://schemas.openxmlformats.org/drawingml/2006/main" r:embed="R0e8e147e00ca48b9">
             <a:alphaModFix/>
           </a:blip>
           <a:srcRect xmlns:a="http://schemas.openxmlformats.org/drawingml/2006/main" l="0" t="0" r="0" b="0"/>
@@ -22435,7 +22375,7 @@
           <p:nvPr/>
         </p:nvPicPr>
         <p:blipFill rotWithShape="1">
-          <a:blip xmlns:r="http://schemas.openxmlformats.org/officeDocument/2006/relationships" xmlns:a="http://schemas.openxmlformats.org/drawingml/2006/main" r:embed="R46b2e6ea6b1b4385">
+          <a:blip xmlns:r="http://schemas.openxmlformats.org/officeDocument/2006/relationships" xmlns:a="http://schemas.openxmlformats.org/drawingml/2006/main" r:embed="Rbd4ad26a57354459">
             <a:alphaModFix/>
           </a:blip>
           <a:srcRect xmlns:a="http://schemas.openxmlformats.org/drawingml/2006/main" l="0" t="0" r="0" b="0"/>
@@ -22465,7 +22405,7 @@
     <p:bg>
       <p:bgPr>
         <a:blipFill xmlns:a="http://schemas.openxmlformats.org/drawingml/2006/main">
-          <a:blip xmlns:r="http://schemas.openxmlformats.org/officeDocument/2006/relationships" r:embed="Rdc865ce6faae488c">
+          <a:blip xmlns:r="http://schemas.openxmlformats.org/officeDocument/2006/relationships" r:embed="R2161cbd10a5148bb">
             <a:alphaModFix/>
           </a:blip>
           <a:stretch>
@@ -23309,7 +23249,7 @@
           <p:nvPr/>
         </p:nvPicPr>
         <p:blipFill rotWithShape="1">
-          <a:blip xmlns:r="http://schemas.openxmlformats.org/officeDocument/2006/relationships" xmlns:a="http://schemas.openxmlformats.org/drawingml/2006/main" r:embed="R8770fcf47b1e4ace">
+          <a:blip xmlns:r="http://schemas.openxmlformats.org/officeDocument/2006/relationships" xmlns:a="http://schemas.openxmlformats.org/drawingml/2006/main" r:embed="Rc80e55977eb64a0d">
             <a:alphaModFix/>
           </a:blip>
           <a:srcRect xmlns:a="http://schemas.openxmlformats.org/drawingml/2006/main" l="0" t="0" r="0" b="0"/>
@@ -23339,7 +23279,7 @@
     <p:bg>
       <p:bgPr>
         <a:blipFill xmlns:a="http://schemas.openxmlformats.org/drawingml/2006/main">
-          <a:blip xmlns:r="http://schemas.openxmlformats.org/officeDocument/2006/relationships" r:embed="R96365f1d5ce84d2d">
+          <a:blip xmlns:r="http://schemas.openxmlformats.org/officeDocument/2006/relationships" r:embed="Rd0c4742924b84b25">
             <a:alphaModFix/>
           </a:blip>
           <a:stretch>
@@ -24287,7 +24227,7 @@
           <p:nvPr/>
         </p:nvPicPr>
         <p:blipFill rotWithShape="1">
-          <a:blip xmlns:r="http://schemas.openxmlformats.org/officeDocument/2006/relationships" xmlns:a="http://schemas.openxmlformats.org/drawingml/2006/main" r:embed="R3efdb053477e497f">
+          <a:blip xmlns:r="http://schemas.openxmlformats.org/officeDocument/2006/relationships" xmlns:a="http://schemas.openxmlformats.org/drawingml/2006/main" r:embed="Rf36edaacdf454158">
             <a:alphaModFix/>
           </a:blip>
           <a:srcRect xmlns:a="http://schemas.openxmlformats.org/drawingml/2006/main" l="0" t="0" r="0" b="0"/>
@@ -24317,7 +24257,7 @@
     <p:bg>
       <p:bgPr>
         <a:blipFill xmlns:a="http://schemas.openxmlformats.org/drawingml/2006/main">
-          <a:blip xmlns:r="http://schemas.openxmlformats.org/officeDocument/2006/relationships" r:embed="Red8c7896faa84c42">
+          <a:blip xmlns:r="http://schemas.openxmlformats.org/officeDocument/2006/relationships" r:embed="R8d2b876002904032">
             <a:alphaModFix/>
           </a:blip>
           <a:stretch>
@@ -24778,7 +24718,7 @@
           <p:nvPr/>
         </p:nvPicPr>
         <p:blipFill rotWithShape="1">
-          <a:blip xmlns:r="http://schemas.openxmlformats.org/officeDocument/2006/relationships" xmlns:a="http://schemas.openxmlformats.org/drawingml/2006/main" r:embed="R5ba2943b2ab24433">
+          <a:blip xmlns:r="http://schemas.openxmlformats.org/officeDocument/2006/relationships" xmlns:a="http://schemas.openxmlformats.org/drawingml/2006/main" r:embed="Re866bfa49e4140bb">
             <a:alphaModFix/>
           </a:blip>
           <a:srcRect xmlns:a="http://schemas.openxmlformats.org/drawingml/2006/main" l="0" t="0" r="0" b="0"/>
@@ -26490,22 +26430,22 @@
   </p:cSld>
   <p:clrMap bg1="lt1" tx1="dk1" bg2="dk2" tx2="lt2" accent1="accent1" accent2="accent2" accent3="accent3" accent4="accent4" accent5="accent5" accent6="accent6" hlink="hlink" folHlink="folHlink"/>
   <p:sldLayoutIdLst>
-    <p:sldLayoutId xmlns:r="http://schemas.openxmlformats.org/officeDocument/2006/relationships" id="2147483649" r:id="R98aa480741c742e0"/>
-    <p:sldLayoutId xmlns:r="http://schemas.openxmlformats.org/officeDocument/2006/relationships" id="2147483650" r:id="Rd10550ecc28a480d"/>
-    <p:sldLayoutId xmlns:r="http://schemas.openxmlformats.org/officeDocument/2006/relationships" id="2147483651" r:id="Rca095aa83a7442d7"/>
-    <p:sldLayoutId xmlns:r="http://schemas.openxmlformats.org/officeDocument/2006/relationships" id="2147483652" r:id="R2e207bfdebdc4b37"/>
-    <p:sldLayoutId xmlns:r="http://schemas.openxmlformats.org/officeDocument/2006/relationships" id="2147483653" r:id="Rf4f9e432a9de4758"/>
-    <p:sldLayoutId xmlns:r="http://schemas.openxmlformats.org/officeDocument/2006/relationships" id="2147483654" r:id="Rb8868e89b4fc4dc1"/>
-    <p:sldLayoutId xmlns:r="http://schemas.openxmlformats.org/officeDocument/2006/relationships" id="2147483655" r:id="Rb765adbccaa54a86"/>
-    <p:sldLayoutId xmlns:r="http://schemas.openxmlformats.org/officeDocument/2006/relationships" id="2147483656" r:id="R55b1b5bc22d84141"/>
-    <p:sldLayoutId xmlns:r="http://schemas.openxmlformats.org/officeDocument/2006/relationships" id="2147483657" r:id="R74691aa871974002"/>
-    <p:sldLayoutId xmlns:r="http://schemas.openxmlformats.org/officeDocument/2006/relationships" id="2147483658" r:id="R63a845e9dcef4dbf"/>
-    <p:sldLayoutId xmlns:r="http://schemas.openxmlformats.org/officeDocument/2006/relationships" id="2147483659" r:id="Rbcb6eaeb39804775"/>
-    <p:sldLayoutId xmlns:r="http://schemas.openxmlformats.org/officeDocument/2006/relationships" id="2147483660" r:id="Rcb0109c63b374f65"/>
-    <p:sldLayoutId xmlns:r="http://schemas.openxmlformats.org/officeDocument/2006/relationships" id="2147483661" r:id="R546630b3f2834b18"/>
-    <p:sldLayoutId xmlns:r="http://schemas.openxmlformats.org/officeDocument/2006/relationships" id="2147483662" r:id="R6f32736fea244eb6"/>
-    <p:sldLayoutId xmlns:r="http://schemas.openxmlformats.org/officeDocument/2006/relationships" id="2147483663" r:id="R450a2d9355594516"/>
-    <p:sldLayoutId xmlns:r="http://schemas.openxmlformats.org/officeDocument/2006/relationships" id="2147483664" r:id="Ra81a2527e2f44fd4"/>
+    <p:sldLayoutId xmlns:r="http://schemas.openxmlformats.org/officeDocument/2006/relationships" id="2147483649" r:id="R943f61cd1cf04c27"/>
+    <p:sldLayoutId xmlns:r="http://schemas.openxmlformats.org/officeDocument/2006/relationships" id="2147483650" r:id="R5cb4d8970d6c4996"/>
+    <p:sldLayoutId xmlns:r="http://schemas.openxmlformats.org/officeDocument/2006/relationships" id="2147483651" r:id="Rfbd3ea71fb714eb8"/>
+    <p:sldLayoutId xmlns:r="http://schemas.openxmlformats.org/officeDocument/2006/relationships" id="2147483652" r:id="R137084687432437c"/>
+    <p:sldLayoutId xmlns:r="http://schemas.openxmlformats.org/officeDocument/2006/relationships" id="2147483653" r:id="Ree7685238ae44fed"/>
+    <p:sldLayoutId xmlns:r="http://schemas.openxmlformats.org/officeDocument/2006/relationships" id="2147483654" r:id="R5194c3350b2b4d84"/>
+    <p:sldLayoutId xmlns:r="http://schemas.openxmlformats.org/officeDocument/2006/relationships" id="2147483655" r:id="R71f0f5dbbab6452f"/>
+    <p:sldLayoutId xmlns:r="http://schemas.openxmlformats.org/officeDocument/2006/relationships" id="2147483656" r:id="Ra507637fbfd44c83"/>
+    <p:sldLayoutId xmlns:r="http://schemas.openxmlformats.org/officeDocument/2006/relationships" id="2147483657" r:id="Rd42b677d9c6441e5"/>
+    <p:sldLayoutId xmlns:r="http://schemas.openxmlformats.org/officeDocument/2006/relationships" id="2147483658" r:id="R4e9dbd7e6c8e446a"/>
+    <p:sldLayoutId xmlns:r="http://schemas.openxmlformats.org/officeDocument/2006/relationships" id="2147483659" r:id="R96bcc194e44d4311"/>
+    <p:sldLayoutId xmlns:r="http://schemas.openxmlformats.org/officeDocument/2006/relationships" id="2147483660" r:id="R4d7c36704e8048dd"/>
+    <p:sldLayoutId xmlns:r="http://schemas.openxmlformats.org/officeDocument/2006/relationships" id="2147483661" r:id="R8c6c47847af740f0"/>
+    <p:sldLayoutId xmlns:r="http://schemas.openxmlformats.org/officeDocument/2006/relationships" id="2147483662" r:id="R581599e9372e4db4"/>
+    <p:sldLayoutId xmlns:r="http://schemas.openxmlformats.org/officeDocument/2006/relationships" id="2147483663" r:id="R4b5faba6e84d4fd4"/>
+    <p:sldLayoutId xmlns:r="http://schemas.openxmlformats.org/officeDocument/2006/relationships" id="2147483664" r:id="R674d88b3313445a8"/>
   </p:sldLayoutIdLst>
   <p:hf hdr="0" ftr="0" dt="0"/>
   <p:txStyles>
@@ -28698,7 +28638,7 @@
           <p:nvPr/>
         </p:nvPicPr>
         <p:blipFill rotWithShape="1">
-          <a:blip xmlns:r="http://schemas.openxmlformats.org/officeDocument/2006/relationships" xmlns:a="http://schemas.openxmlformats.org/drawingml/2006/main" r:embed="R606e7d29b5454e20">
+          <a:blip xmlns:r="http://schemas.openxmlformats.org/officeDocument/2006/relationships" xmlns:a="http://schemas.openxmlformats.org/drawingml/2006/main" r:embed="R989bf3bb3eba40b1">
             <a:alphaModFix/>
           </a:blip>
           <a:srcRect xmlns:a="http://schemas.openxmlformats.org/drawingml/2006/main" l="0" t="0" r="0" b="0"/>
@@ -28721,19 +28661,19 @@
   </p:cSld>
   <p:clrMap bg1="lt1" tx1="dk1" bg2="dk2" tx2="lt2" accent1="accent1" accent2="accent2" accent3="accent3" accent4="accent4" accent5="accent5" accent6="accent6" hlink="hlink" folHlink="folHlink"/>
   <p:sldLayoutIdLst>
-    <p:sldLayoutId xmlns:r="http://schemas.openxmlformats.org/officeDocument/2006/relationships" id="2147483666" r:id="Rfa2961ac51e54da1"/>
-    <p:sldLayoutId xmlns:r="http://schemas.openxmlformats.org/officeDocument/2006/relationships" id="2147483667" r:id="Rfda6adf6d1f949ac"/>
-    <p:sldLayoutId xmlns:r="http://schemas.openxmlformats.org/officeDocument/2006/relationships" id="2147483668" r:id="R30cf4c40d7784583"/>
-    <p:sldLayoutId xmlns:r="http://schemas.openxmlformats.org/officeDocument/2006/relationships" id="2147483669" r:id="R11acc0182e914468"/>
-    <p:sldLayoutId xmlns:r="http://schemas.openxmlformats.org/officeDocument/2006/relationships" id="2147483670" r:id="R6e85bcc0219343e7"/>
-    <p:sldLayoutId xmlns:r="http://schemas.openxmlformats.org/officeDocument/2006/relationships" id="2147483671" r:id="Rf1ee717b1cd74963"/>
-    <p:sldLayoutId xmlns:r="http://schemas.openxmlformats.org/officeDocument/2006/relationships" id="2147483672" r:id="Rffc96e2dd8a242ed"/>
-    <p:sldLayoutId xmlns:r="http://schemas.openxmlformats.org/officeDocument/2006/relationships" id="2147483673" r:id="R09712b4ddf2c4a99"/>
-    <p:sldLayoutId xmlns:r="http://schemas.openxmlformats.org/officeDocument/2006/relationships" id="2147483674" r:id="R3ebfe290c35e4e48"/>
-    <p:sldLayoutId xmlns:r="http://schemas.openxmlformats.org/officeDocument/2006/relationships" id="2147483675" r:id="Rbd370256281e4abf"/>
-    <p:sldLayoutId xmlns:r="http://schemas.openxmlformats.org/officeDocument/2006/relationships" id="2147483676" r:id="R81ac76759ac141b9"/>
-    <p:sldLayoutId xmlns:r="http://schemas.openxmlformats.org/officeDocument/2006/relationships" id="2147483677" r:id="R7c8761d9669d4c4f"/>
-    <p:sldLayoutId xmlns:r="http://schemas.openxmlformats.org/officeDocument/2006/relationships" id="2147483678" r:id="R221a4bcf183f4985"/>
+    <p:sldLayoutId xmlns:r="http://schemas.openxmlformats.org/officeDocument/2006/relationships" id="2147483666" r:id="Rd7d9964ad8654b92"/>
+    <p:sldLayoutId xmlns:r="http://schemas.openxmlformats.org/officeDocument/2006/relationships" id="2147483667" r:id="R5fd1d4ce8b5d4a36"/>
+    <p:sldLayoutId xmlns:r="http://schemas.openxmlformats.org/officeDocument/2006/relationships" id="2147483668" r:id="Rfb8ad46e38d24210"/>
+    <p:sldLayoutId xmlns:r="http://schemas.openxmlformats.org/officeDocument/2006/relationships" id="2147483669" r:id="R2ee0817cef404d67"/>
+    <p:sldLayoutId xmlns:r="http://schemas.openxmlformats.org/officeDocument/2006/relationships" id="2147483670" r:id="R2b061bbe8be04b76"/>
+    <p:sldLayoutId xmlns:r="http://schemas.openxmlformats.org/officeDocument/2006/relationships" id="2147483671" r:id="Re87a214da53f4b8c"/>
+    <p:sldLayoutId xmlns:r="http://schemas.openxmlformats.org/officeDocument/2006/relationships" id="2147483672" r:id="R0fedb25507bb4b6c"/>
+    <p:sldLayoutId xmlns:r="http://schemas.openxmlformats.org/officeDocument/2006/relationships" id="2147483673" r:id="R8b87bd1679554eb4"/>
+    <p:sldLayoutId xmlns:r="http://schemas.openxmlformats.org/officeDocument/2006/relationships" id="2147483674" r:id="Rc6df34eb1da449c3"/>
+    <p:sldLayoutId xmlns:r="http://schemas.openxmlformats.org/officeDocument/2006/relationships" id="2147483675" r:id="R00ca7277b46d4623"/>
+    <p:sldLayoutId xmlns:r="http://schemas.openxmlformats.org/officeDocument/2006/relationships" id="2147483676" r:id="Raef5e2dce55c4c81"/>
+    <p:sldLayoutId xmlns:r="http://schemas.openxmlformats.org/officeDocument/2006/relationships" id="2147483677" r:id="R1ca413dad47e421f"/>
+    <p:sldLayoutId xmlns:r="http://schemas.openxmlformats.org/officeDocument/2006/relationships" id="2147483678" r:id="R553c226afc7c46d6"/>
   </p:sldLayoutIdLst>
   <p:hf hdr="0" ftr="0" dt="0"/>
   <p:txStyles>
